--- a/media/resources/files/Onduktar_Akcha_KondumA.pptx
+++ b/media/resources/files/Onduktar_Akcha_KondumA.pptx
@@ -10598,7 +10598,7 @@
                 <a:ea typeface="+mn-ea"/>
                 <a:cs typeface="+mn-cs"/>
               </a:rPr>
-              <a:t>Турдуу пикирлер учун ыраазычылык билдиребиз.</a:t>
+              <a:t>Түрдүү пикирлер үчүн ыраазычылык билдиребиз.</a:t>
             </a:r>
           </a:p>
           <a:p>

--- a/media/resources/files/Onduktar_Akcha_KondumA.pptx
+++ b/media/resources/files/Onduktar_Akcha_KondumA.pptx
@@ -1502,7 +1502,7 @@
                   <a:schemeClr val="tx1"/>
                 </a:solidFill>
               </a:rPr>
-              <a:t>1.17</a:t>
+              <a:t>1,17</a:t>
             </a:r>
             <a:r>
               <a:rPr lang="ky-KG" sz="1200" dirty="0">
@@ -2100,7 +2100,7 @@
                   <a:schemeClr val="tx1"/>
                 </a:solidFill>
               </a:rPr>
-              <a:t>1.33</a:t>
+              <a:t>1,33</a:t>
             </a:r>
             <a:r>
               <a:rPr lang="ky-KG" sz="1200" dirty="0">
@@ -2179,7 +2179,7 @@
                   <a:schemeClr val="tx1"/>
                 </a:solidFill>
               </a:rPr>
-              <a:t>1.56</a:t>
+              <a:t>1,56</a:t>
             </a:r>
             <a:r>
               <a:rPr lang="ky-KG" sz="1200" dirty="0">
@@ -2337,7 +2337,7 @@
                   <a:schemeClr val="tx1"/>
                 </a:solidFill>
               </a:rPr>
-              <a:t>1.28</a:t>
+              <a:t>1,28</a:t>
             </a:r>
             <a:r>
               <a:rPr lang="ky-KG" sz="1200" dirty="0">
@@ -2924,7 +2924,7 @@
           <a:p>
             <a:r>
               <a:rPr lang="en-GB" sz="1600" dirty="0"/>
-              <a:t>1.79</a:t>
+              <a:t>1,79</a:t>
             </a:r>
             <a:r>
               <a:rPr lang="ky-KG" sz="1600" dirty="0"/>
@@ -2971,7 +2971,7 @@
           <a:p>
             <a:r>
               <a:rPr lang="en-GB" sz="1600" dirty="0"/>
-              <a:t>2.52</a:t>
+              <a:t>2,52</a:t>
             </a:r>
             <a:r>
               <a:rPr lang="ky-KG" sz="1600" dirty="0"/>
@@ -3018,7 +3018,7 @@
           <a:p>
             <a:r>
               <a:rPr lang="en-GB" sz="1600" dirty="0"/>
-              <a:t>3.17</a:t>
+              <a:t>3,17</a:t>
             </a:r>
             <a:r>
               <a:rPr lang="ky-KG" sz="1600" dirty="0"/>
@@ -3065,7 +3065,7 @@
           <a:p>
             <a:r>
               <a:rPr lang="en-GB" sz="1600" dirty="0"/>
-              <a:t>1.44</a:t>
+              <a:t>1,44</a:t>
             </a:r>
             <a:r>
               <a:rPr lang="ky-KG" sz="1600" dirty="0"/>
@@ -3112,7 +3112,7 @@
           <a:p>
             <a:r>
               <a:rPr lang="en-GB" sz="1600" dirty="0"/>
-              <a:t>3.06</a:t>
+              <a:t>3,06</a:t>
             </a:r>
             <a:r>
               <a:rPr lang="ky-KG" sz="1600" dirty="0"/>
@@ -3159,7 +3159,7 @@
           <a:p>
             <a:r>
               <a:rPr lang="en-GB" sz="1600" dirty="0"/>
-              <a:t>4.73</a:t>
+              <a:t>4,73</a:t>
             </a:r>
             <a:r>
               <a:rPr lang="ky-KG" sz="1600" dirty="0"/>
@@ -3206,7 +3206,7 @@
           <a:p>
             <a:r>
               <a:rPr lang="en-GB" sz="1600" dirty="0"/>
-              <a:t>6.24</a:t>
+              <a:t>6,24</a:t>
             </a:r>
             <a:r>
               <a:rPr lang="ky-KG" sz="1600" dirty="0"/>
@@ -3253,7 +3253,7 @@
           <a:p>
             <a:r>
               <a:rPr lang="en-GB" sz="1600" dirty="0"/>
-              <a:t>6.46</a:t>
+              <a:t>6,46</a:t>
             </a:r>
             <a:r>
               <a:rPr lang="ky-KG" sz="1600" dirty="0"/>
@@ -3515,7 +3515,7 @@
                   <a:schemeClr val="tx1"/>
                 </a:solidFill>
               </a:rPr>
-              <a:t>1.17</a:t>
+              <a:t>1,17</a:t>
             </a:r>
             <a:r>
               <a:rPr lang="ky-KG" sz="1200" dirty="0">
@@ -4113,7 +4113,7 @@
                   <a:schemeClr val="tx1"/>
                 </a:solidFill>
               </a:rPr>
-              <a:t>1.33</a:t>
+              <a:t>1,33</a:t>
             </a:r>
             <a:r>
               <a:rPr lang="ky-KG" sz="1200" dirty="0">
@@ -4192,7 +4192,7 @@
                   <a:schemeClr val="tx1"/>
                 </a:solidFill>
               </a:rPr>
-              <a:t>1.56</a:t>
+              <a:t>1,56</a:t>
             </a:r>
             <a:r>
               <a:rPr lang="ky-KG" sz="1200" dirty="0">
@@ -4350,7 +4350,7 @@
                   <a:schemeClr val="tx1"/>
                 </a:solidFill>
               </a:rPr>
-              <a:t>1.28</a:t>
+              <a:t>1,28</a:t>
             </a:r>
             <a:r>
               <a:rPr lang="ky-KG" sz="1200" dirty="0">
@@ -4937,7 +4937,7 @@
           <a:p>
             <a:r>
               <a:rPr lang="en-GB" sz="1600" dirty="0"/>
-              <a:t>4.23</a:t>
+              <a:t>4,23</a:t>
             </a:r>
             <a:r>
               <a:rPr lang="ky-KG" sz="1600" dirty="0"/>
@@ -4984,7 +4984,7 @@
           <a:p>
             <a:r>
               <a:rPr lang="en-GB" sz="1600" dirty="0"/>
-              <a:t>6.88</a:t>
+              <a:t>6,88</a:t>
             </a:r>
             <a:r>
               <a:rPr lang="ky-KG" sz="1600" dirty="0"/>
@@ -5031,7 +5031,7 @@
           <a:p>
             <a:r>
               <a:rPr lang="en-GB" sz="1600" dirty="0"/>
-              <a:t>5.47</a:t>
+              <a:t>5,47</a:t>
             </a:r>
             <a:r>
               <a:rPr lang="ky-KG" sz="1600" dirty="0"/>
@@ -5078,7 +5078,7 @@
           <a:p>
             <a:r>
               <a:rPr lang="en-GB" sz="1600" dirty="0"/>
-              <a:t>6.33</a:t>
+              <a:t>6,33</a:t>
             </a:r>
             <a:r>
               <a:rPr lang="ky-KG" sz="1600" dirty="0"/>
@@ -5125,7 +5125,7 @@
           <a:p>
             <a:r>
               <a:rPr lang="en-GB" sz="1600" dirty="0"/>
-              <a:t>10.46</a:t>
+              <a:t>10,46</a:t>
             </a:r>
             <a:r>
               <a:rPr lang="ky-KG" sz="1600" dirty="0"/>
@@ -5172,7 +5172,7 @@
           <a:p>
             <a:r>
               <a:rPr lang="en-GB" sz="1600" dirty="0"/>
-              <a:t>10.33</a:t>
+              <a:t>10,33</a:t>
             </a:r>
             <a:r>
               <a:rPr lang="ky-KG" sz="1600" dirty="0"/>
@@ -5219,7 +5219,7 @@
           <a:p>
             <a:r>
               <a:rPr lang="en-GB" sz="1600" dirty="0"/>
-              <a:t>8.35</a:t>
+              <a:t>8,35</a:t>
             </a:r>
             <a:r>
               <a:rPr lang="ky-KG" sz="1600" dirty="0"/>
@@ -5266,7 +5266,7 @@
           <a:p>
             <a:r>
               <a:rPr lang="en-GB" sz="1600" dirty="0"/>
-              <a:t>10.36</a:t>
+              <a:t>10,36</a:t>
             </a:r>
             <a:r>
               <a:rPr lang="ky-KG" sz="1600" dirty="0"/>
@@ -5528,7 +5528,7 @@
                   <a:schemeClr val="tx1"/>
                 </a:solidFill>
               </a:rPr>
-              <a:t>1.17</a:t>
+              <a:t>1,17</a:t>
             </a:r>
             <a:r>
               <a:rPr lang="ky-KG" sz="1200" dirty="0">
@@ -6126,7 +6126,7 @@
                   <a:schemeClr val="tx1"/>
                 </a:solidFill>
               </a:rPr>
-              <a:t>1.33</a:t>
+              <a:t>1,33</a:t>
             </a:r>
             <a:r>
               <a:rPr lang="ky-KG" sz="1200" dirty="0">
@@ -6205,7 +6205,7 @@
                   <a:schemeClr val="tx1"/>
                 </a:solidFill>
               </a:rPr>
-              <a:t>1.56</a:t>
+              <a:t>1,56</a:t>
             </a:r>
             <a:r>
               <a:rPr lang="ky-KG" sz="1200" dirty="0">
@@ -6363,7 +6363,7 @@
                   <a:schemeClr val="tx1"/>
                 </a:solidFill>
               </a:rPr>
-              <a:t>1.28</a:t>
+              <a:t>1,28</a:t>
             </a:r>
             <a:r>
               <a:rPr lang="ky-KG" sz="1200" dirty="0">
@@ -6619,7 +6619,7 @@
           <a:p>
             <a:r>
               <a:rPr lang="en-GB" sz="1600" dirty="0"/>
-              <a:t>1.79</a:t>
+              <a:t>1,79</a:t>
             </a:r>
             <a:r>
               <a:rPr lang="ky-KG" sz="1600" dirty="0"/>
@@ -6666,7 +6666,7 @@
           <a:p>
             <a:r>
               <a:rPr lang="en-GB" sz="1600" dirty="0"/>
-              <a:t>2.52</a:t>
+              <a:t>2,52</a:t>
             </a:r>
             <a:r>
               <a:rPr lang="ky-KG" sz="1600" dirty="0"/>
@@ -6713,7 +6713,7 @@
           <a:p>
             <a:r>
               <a:rPr lang="en-GB" sz="1600" dirty="0"/>
-              <a:t>3.17</a:t>
+              <a:t>3,17</a:t>
             </a:r>
             <a:r>
               <a:rPr lang="ky-KG" sz="1600" dirty="0"/>
@@ -6760,7 +6760,7 @@
           <a:p>
             <a:r>
               <a:rPr lang="en-GB" sz="1600" dirty="0"/>
-              <a:t>1.44</a:t>
+              <a:t>1,44</a:t>
             </a:r>
             <a:r>
               <a:rPr lang="ky-KG" sz="1600" dirty="0"/>
@@ -6807,7 +6807,7 @@
           <a:p>
             <a:r>
               <a:rPr lang="en-GB" sz="1600" dirty="0"/>
-              <a:t>3.06</a:t>
+              <a:t>3,06</a:t>
             </a:r>
             <a:r>
               <a:rPr lang="ky-KG" sz="1600" dirty="0"/>
@@ -6854,7 +6854,7 @@
           <a:p>
             <a:r>
               <a:rPr lang="en-GB" sz="1600" dirty="0"/>
-              <a:t>4.73</a:t>
+              <a:t>4,73</a:t>
             </a:r>
             <a:r>
               <a:rPr lang="ky-KG" sz="1600" dirty="0"/>
@@ -6901,7 +6901,7 @@
           <a:p>
             <a:r>
               <a:rPr lang="en-GB" sz="1600" dirty="0"/>
-              <a:t>6.24</a:t>
+              <a:t>6,24</a:t>
             </a:r>
             <a:r>
               <a:rPr lang="ky-KG" sz="1600" dirty="0"/>
@@ -6948,7 +6948,7 @@
           <a:p>
             <a:r>
               <a:rPr lang="en-GB" sz="1600" dirty="0"/>
-              <a:t>6.46</a:t>
+              <a:t>6,46</a:t>
             </a:r>
             <a:r>
               <a:rPr lang="ky-KG" sz="1600" dirty="0"/>
@@ -7430,7 +7430,7 @@
                   <a:schemeClr val="tx1"/>
                 </a:solidFill>
               </a:rPr>
-              <a:t>1.17</a:t>
+              <a:t>1,17</a:t>
             </a:r>
             <a:r>
               <a:rPr lang="ky-KG" sz="1200" dirty="0">
@@ -8028,7 +8028,7 @@
                   <a:schemeClr val="tx1"/>
                 </a:solidFill>
               </a:rPr>
-              <a:t>1.33</a:t>
+              <a:t>1,33</a:t>
             </a:r>
             <a:r>
               <a:rPr lang="ky-KG" sz="1200" dirty="0">
@@ -8107,7 +8107,7 @@
                   <a:schemeClr val="tx1"/>
                 </a:solidFill>
               </a:rPr>
-              <a:t>1.56</a:t>
+              <a:t>1,56</a:t>
             </a:r>
             <a:r>
               <a:rPr lang="ky-KG" sz="1200" dirty="0">
@@ -8265,7 +8265,7 @@
                   <a:schemeClr val="tx1"/>
                 </a:solidFill>
               </a:rPr>
-              <a:t>1.28</a:t>
+              <a:t>1,28</a:t>
             </a:r>
             <a:r>
               <a:rPr lang="ky-KG" sz="1200" dirty="0">
@@ -8915,7 +8915,7 @@
                   <a:schemeClr val="tx1"/>
                 </a:solidFill>
               </a:rPr>
-              <a:t>1.17</a:t>
+              <a:t>1,17</a:t>
             </a:r>
             <a:r>
               <a:rPr lang="ky-KG" sz="1200" dirty="0">
@@ -9513,7 +9513,7 @@
                   <a:schemeClr val="tx1"/>
                 </a:solidFill>
               </a:rPr>
-              <a:t>1.33</a:t>
+              <a:t>1,33</a:t>
             </a:r>
             <a:r>
               <a:rPr lang="ky-KG" sz="1200" dirty="0">
@@ -9592,7 +9592,7 @@
                   <a:schemeClr val="tx1"/>
                 </a:solidFill>
               </a:rPr>
-              <a:t>1.56</a:t>
+              <a:t>1,56</a:t>
             </a:r>
             <a:r>
               <a:rPr lang="ky-KG" sz="1200" dirty="0">
@@ -9750,7 +9750,7 @@
                   <a:schemeClr val="tx1"/>
                 </a:solidFill>
               </a:rPr>
-              <a:t>1.28</a:t>
+              <a:t>1,28</a:t>
             </a:r>
             <a:r>
               <a:rPr lang="ky-KG" sz="1200" dirty="0">
